--- a/word-drafts/figures/OpenUSD-Fig1-Architecture.pptx
+++ b/word-drafts/figures/OpenUSD-Fig1-Architecture.pptx
@@ -7,7 +7,7 @@
   <p:sldIdLst>
     <p:sldId id="256" r:id="rId7"/>
   </p:sldIdLst>
-  <p:sldSz cx="8001000" cy="5600700" type="screen4x3"/>
+  <p:sldSz cx="9458325" cy="5772150" type="screen4x3"/>
   <p:notesSz cx="6858000" cy="9144000"/>
   <p:defaultTextStyle>
     <a:defPPr>
@@ -3096,8 +3096,8 @@
         </p:nvSpPr>
         <p:spPr>
           <a:xfrm>
-            <a:off x="76200" y="76200"/>
-            <a:ext cx="5105400" cy="5448300"/>
+            <a:off x="247650" y="1162050"/>
+            <a:ext cx="6391275" cy="4362450"/>
           </a:xfrm>
           <a:prstGeom prst="roundRect">
             <a:avLst/>
@@ -3149,7 +3149,7 @@
         </p:nvSpPr>
         <p:spPr>
           <a:xfrm>
-            <a:off x="247650" y="1562100"/>
+            <a:off x="419100" y="1562100"/>
             <a:ext cx="2190750" cy="533400"/>
           </a:xfrm>
           <a:prstGeom prst="rect">
@@ -3202,7 +3202,7 @@
         </p:nvSpPr>
         <p:spPr>
           <a:xfrm>
-            <a:off x="247650" y="2647950"/>
+            <a:off x="1704975" y="2647950"/>
             <a:ext cx="2190750" cy="533400"/>
           </a:xfrm>
           <a:prstGeom prst="rect">
@@ -3255,7 +3255,7 @@
         </p:nvSpPr>
         <p:spPr>
           <a:xfrm>
-            <a:off x="2819400" y="2647950"/>
+            <a:off x="4276725" y="2647950"/>
             <a:ext cx="2190750" cy="533400"/>
           </a:xfrm>
           <a:prstGeom prst="rect">
@@ -3308,7 +3308,7 @@
         </p:nvSpPr>
         <p:spPr>
           <a:xfrm>
-            <a:off x="247650" y="4819650"/>
+            <a:off x="1704975" y="4819650"/>
             <a:ext cx="2190750" cy="533400"/>
           </a:xfrm>
           <a:prstGeom prst="rect">
@@ -3361,7 +3361,7 @@
         </p:nvSpPr>
         <p:spPr>
           <a:xfrm>
-            <a:off x="247650" y="476250"/>
+            <a:off x="2990850" y="1562100"/>
             <a:ext cx="2190750" cy="533400"/>
           </a:xfrm>
           <a:prstGeom prst="rect">
@@ -3414,7 +3414,7 @@
         </p:nvSpPr>
         <p:spPr>
           <a:xfrm>
-            <a:off x="1533525" y="3733800"/>
+            <a:off x="2990850" y="3733800"/>
             <a:ext cx="2190750" cy="533400"/>
           </a:xfrm>
           <a:prstGeom prst="rect">
@@ -3467,7 +3467,7 @@
         </p:nvSpPr>
         <p:spPr>
           <a:xfrm>
-            <a:off x="2819400" y="4819650"/>
+            <a:off x="4276725" y="4819650"/>
             <a:ext cx="2190750" cy="533400"/>
           </a:xfrm>
           <a:prstGeom prst="rect">
@@ -3520,7 +3520,7 @@
         </p:nvSpPr>
         <p:spPr>
           <a:xfrm>
-            <a:off x="5562600" y="476250"/>
+            <a:off x="2990850" y="476250"/>
             <a:ext cx="2190750" cy="533400"/>
           </a:xfrm>
           <a:prstGeom prst="rect">
@@ -3584,7 +3584,7 @@
         </p:nvSpPr>
         <p:spPr>
           <a:xfrm>
-            <a:off x="5562600" y="1562100"/>
+            <a:off x="7019925" y="1562100"/>
             <a:ext cx="2190750" cy="533400"/>
           </a:xfrm>
           <a:prstGeom prst="rect">
@@ -3640,8 +3640,8 @@
         </p:nvCxnSpPr>
         <p:spPr>
           <a:xfrm>
-            <a:off x="1343025" y="2095500"/>
-            <a:ext cx="0" cy="552450"/>
+            <a:off x="1514475" y="2095500"/>
+            <a:ext cx="1285875" cy="552450"/>
           </a:xfrm>
           <a:prstGeom prst="line">
             <a:avLst/>
@@ -3678,7 +3678,7 @@
         </p:nvCxnSpPr>
         <p:spPr>
           <a:xfrm>
-            <a:off x="1343025" y="3181350"/>
+            <a:off x="2800350" y="3181350"/>
             <a:ext cx="0" cy="1638300"/>
           </a:xfrm>
           <a:prstGeom prst="line">
@@ -3716,8 +3716,8 @@
         </p:nvCxnSpPr>
         <p:spPr>
           <a:xfrm>
-            <a:off x="1343025" y="2095500"/>
-            <a:ext cx="2571750" cy="552450"/>
+            <a:off x="1514475" y="2095500"/>
+            <a:ext cx="3857625" cy="552450"/>
           </a:xfrm>
           <a:prstGeom prst="line">
             <a:avLst/>
@@ -3754,8 +3754,8 @@
         </p:nvCxnSpPr>
         <p:spPr>
           <a:xfrm>
-            <a:off x="1343025" y="1009650"/>
-            <a:ext cx="1285875" cy="2724150"/>
+            <a:off x="4086225" y="2095500"/>
+            <a:ext cx="0" cy="1638300"/>
           </a:xfrm>
           <a:prstGeom prst="line">
             <a:avLst/>
@@ -3781,9 +3781,42 @@
           </a:fontRef>
         </p:style>
       </p:cxnSp>
+      <p:sp>
+        <p:nvSpPr>
+          <p:cNvPr id="16" name="TextBox 15"/>
+          <p:cNvSpPr txBox="1"/>
+          <p:nvPr/>
+        </p:nvSpPr>
+        <p:spPr>
+          <a:xfrm>
+            <a:off x="4124325" y="3286125"/>
+            <a:ext cx="409575" cy="123825"/>
+          </a:xfrm>
+          <a:prstGeom prst="rect">
+            <a:avLst/>
+          </a:prstGeom>
+          <a:noFill/>
+        </p:spPr>
+        <p:txBody>
+          <a:bodyPr wrap="none" lIns="0" rIns="0" tIns="0" bIns="0">
+            <a:spAutoFit/>
+          </a:bodyPr>
+          <a:lstStyle/>
+          <a:p>
+            <a:r>
+              <a:rPr sz="800">
+                <a:solidFill>
+                  <a:srgbClr val="444444"/>
+                </a:solidFill>
+              </a:rPr>
+              <a:t>HasAddIn</a:t>
+            </a:r>
+          </a:p>
+        </p:txBody>
+      </p:sp>
       <p:cxnSp>
         <p:nvCxnSpPr>
-          <p:cNvPr id="16" name="Connector 15"/>
+          <p:cNvPr id="17" name="Connector 16"/>
           <p:cNvCxnSpPr>
             <a:stCxn id="5" idx="2"/>
             <a:endCxn id="8" idx="0"/>
@@ -3792,7 +3825,79 @@
         </p:nvCxnSpPr>
         <p:spPr>
           <a:xfrm flipH="1">
-            <a:off x="2628900" y="3181350"/>
+            <a:off x="4086225" y="3181350"/>
+            <a:ext cx="1285875" cy="552450"/>
+          </a:xfrm>
+          <a:prstGeom prst="line">
+            <a:avLst/>
+          </a:prstGeom>
+          <a:ln w="12700">
+            <a:solidFill>
+              <a:srgbClr val="444444"/>
+            </a:solidFill>
+            <a:prstDash val="dash"/>
+          </a:ln>
+        </p:spPr>
+        <p:style>
+          <a:lnRef idx="2">
+            <a:schemeClr val="accent1"/>
+          </a:lnRef>
+          <a:fillRef idx="0">
+            <a:schemeClr val="accent1"/>
+          </a:fillRef>
+          <a:effectRef idx="1">
+            <a:schemeClr val="accent1"/>
+          </a:effectRef>
+          <a:fontRef idx="minor">
+            <a:schemeClr val="tx1"/>
+          </a:fontRef>
+        </p:style>
+      </p:cxnSp>
+      <p:sp>
+        <p:nvSpPr>
+          <p:cNvPr id="18" name="TextBox 17"/>
+          <p:cNvSpPr txBox="1"/>
+          <p:nvPr/>
+        </p:nvSpPr>
+        <p:spPr>
+          <a:xfrm>
+            <a:off x="4767262" y="3400425"/>
+            <a:ext cx="428625" cy="123825"/>
+          </a:xfrm>
+          <a:prstGeom prst="rect">
+            <a:avLst/>
+          </a:prstGeom>
+          <a:noFill/>
+        </p:spPr>
+        <p:txBody>
+          <a:bodyPr wrap="none" lIns="0" rIns="0" tIns="0" bIns="0">
+            <a:spAutoFit/>
+          </a:bodyPr>
+          <a:lstStyle/>
+          <a:p>
+            <a:r>
+              <a:rPr sz="800">
+                <a:solidFill>
+                  <a:srgbClr val="444444"/>
+                </a:solidFill>
+              </a:rPr>
+              <a:t>Organizes</a:t>
+            </a:r>
+          </a:p>
+        </p:txBody>
+      </p:sp>
+      <p:cxnSp>
+        <p:nvCxnSpPr>
+          <p:cNvPr id="19" name="Connector 18"/>
+          <p:cNvCxnSpPr>
+            <a:stCxn id="8" idx="2"/>
+            <a:endCxn id="9" idx="0"/>
+          </p:cNvCxnSpPr>
+          <p:nvPr/>
+        </p:nvCxnSpPr>
+        <p:spPr>
+          <a:xfrm>
+            <a:off x="4086225" y="4267200"/>
             <a:ext cx="1285875" cy="552450"/>
           </a:xfrm>
           <a:prstGeom prst="line">
@@ -3821,16 +3926,16 @@
       </p:cxnSp>
       <p:cxnSp>
         <p:nvCxnSpPr>
-          <p:cNvPr id="17" name="Connector 16"/>
+          <p:cNvPr id="20" name="Connector 19"/>
           <p:cNvCxnSpPr>
             <a:stCxn id="8" idx="2"/>
-            <a:endCxn id="9" idx="0"/>
+            <a:endCxn id="6" idx="0"/>
           </p:cNvCxnSpPr>
           <p:nvPr/>
         </p:nvCxnSpPr>
         <p:spPr>
-          <a:xfrm>
-            <a:off x="2628900" y="4267200"/>
+          <a:xfrm flipH="1">
+            <a:off x="2800350" y="4267200"/>
             <a:ext cx="1285875" cy="552450"/>
           </a:xfrm>
           <a:prstGeom prst="line">
@@ -3857,19 +3962,52 @@
           </a:fontRef>
         </p:style>
       </p:cxnSp>
+      <p:sp>
+        <p:nvSpPr>
+          <p:cNvPr id="21" name="TextBox 20"/>
+          <p:cNvSpPr txBox="1"/>
+          <p:nvPr/>
+        </p:nvSpPr>
+        <p:spPr>
+          <a:xfrm>
+            <a:off x="3481387" y="4486275"/>
+            <a:ext cx="266700" cy="123825"/>
+          </a:xfrm>
+          <a:prstGeom prst="rect">
+            <a:avLst/>
+          </a:prstGeom>
+          <a:noFill/>
+        </p:spPr>
+        <p:txBody>
+          <a:bodyPr wrap="none" lIns="0" rIns="0" tIns="0" bIns="0">
+            <a:spAutoFit/>
+          </a:bodyPr>
+          <a:lstStyle/>
+          <a:p>
+            <a:r>
+              <a:rPr sz="800">
+                <a:solidFill>
+                  <a:srgbClr val="444444"/>
+                </a:solidFill>
+              </a:rPr>
+              <a:t>Stage</a:t>
+            </a:r>
+          </a:p>
+        </p:txBody>
+      </p:sp>
       <p:cxnSp>
         <p:nvCxnSpPr>
-          <p:cNvPr id="18" name="Connector 17"/>
+          <p:cNvPr id="22" name="Connector 21"/>
           <p:cNvCxnSpPr>
-            <a:stCxn id="8" idx="2"/>
-            <a:endCxn id="6" idx="0"/>
+            <a:stCxn id="10" idx="2"/>
+            <a:endCxn id="3" idx="0"/>
           </p:cNvCxnSpPr>
           <p:nvPr/>
         </p:nvCxnSpPr>
         <p:spPr>
           <a:xfrm flipH="1">
-            <a:off x="1343025" y="4267200"/>
-            <a:ext cx="1285875" cy="552450"/>
+            <a:off x="1514475" y="1009650"/>
+            <a:ext cx="2571750" cy="552450"/>
           </a:xfrm>
           <a:prstGeom prst="line">
             <a:avLst/>
@@ -3897,45 +4035,7 @@
       </p:cxnSp>
       <p:cxnSp>
         <p:nvCxnSpPr>
-          <p:cNvPr id="19" name="Connector 18"/>
-          <p:cNvCxnSpPr>
-            <a:stCxn id="10" idx="2"/>
-            <a:endCxn id="3" idx="0"/>
-          </p:cNvCxnSpPr>
-          <p:nvPr/>
-        </p:nvCxnSpPr>
-        <p:spPr>
-          <a:xfrm flipH="1">
-            <a:off x="1343025" y="1009650"/>
-            <a:ext cx="5314950" cy="552450"/>
-          </a:xfrm>
-          <a:prstGeom prst="line">
-            <a:avLst/>
-          </a:prstGeom>
-          <a:ln w="12700">
-            <a:solidFill>
-              <a:srgbClr val="444444"/>
-            </a:solidFill>
-          </a:ln>
-        </p:spPr>
-        <p:style>
-          <a:lnRef idx="2">
-            <a:schemeClr val="accent1"/>
-          </a:lnRef>
-          <a:fillRef idx="0">
-            <a:schemeClr val="accent1"/>
-          </a:fillRef>
-          <a:effectRef idx="1">
-            <a:schemeClr val="accent1"/>
-          </a:effectRef>
-          <a:fontRef idx="minor">
-            <a:schemeClr val="tx1"/>
-          </a:fontRef>
-        </p:style>
-      </p:cxnSp>
-      <p:cxnSp>
-        <p:nvCxnSpPr>
-          <p:cNvPr id="20" name="Connector 19"/>
+          <p:cNvPr id="23" name="Connector 22"/>
           <p:cNvCxnSpPr>
             <a:stCxn id="10" idx="2"/>
             <a:endCxn id="11" idx="0"/>
@@ -3944,8 +4044,8 @@
         </p:nvCxnSpPr>
         <p:spPr>
           <a:xfrm>
-            <a:off x="6657975" y="1009650"/>
-            <a:ext cx="0" cy="552450"/>
+            <a:off x="4086225" y="1009650"/>
+            <a:ext cx="4029075" cy="552450"/>
           </a:xfrm>
           <a:prstGeom prst="line">
             <a:avLst/>

--- a/word-drafts/figures/OpenUSD-Fig1-Architecture.pptx
+++ b/word-drafts/figures/OpenUSD-Fig1-Architecture.pptx
@@ -3790,7 +3790,7 @@
         <p:spPr>
           <a:xfrm>
             <a:off x="4124325" y="3286125"/>
-            <a:ext cx="409575" cy="123825"/>
+            <a:ext cx="504825" cy="123825"/>
           </a:xfrm>
           <a:prstGeom prst="rect">
             <a:avLst/>
@@ -3862,7 +3862,7 @@
         <p:spPr>
           <a:xfrm>
             <a:off x="4767262" y="3400425"/>
-            <a:ext cx="428625" cy="123825"/>
+            <a:ext cx="533400" cy="123825"/>
           </a:xfrm>
           <a:prstGeom prst="rect">
             <a:avLst/>
@@ -3971,7 +3971,7 @@
         <p:spPr>
           <a:xfrm>
             <a:off x="3481387" y="4486275"/>
-            <a:ext cx="266700" cy="123825"/>
+            <a:ext cx="323850" cy="123825"/>
           </a:xfrm>
           <a:prstGeom prst="rect">
             <a:avLst/>
